--- a/classes/parte-1-machine-learning-clasico/099-deteccion-de-anomalias-isolation-forest-lof-one-class-svm/clase-099-deteccion-de-anomalias-isolation-forest-lof-one-class-svm-presentacion.pptx
+++ b/classes/parte-1-machine-learning-clasico/099-deteccion-de-anomalias-isolation-forest-lof-one-class-svm/clase-099-deteccion-de-anomalias-isolation-forest-lof-one-class-svm-presentacion.pptx
@@ -4955,7 +4955,7 @@
                 </a:solidFill>
                 <a:latin typeface="Segoe UI"/>
               </a:rPr>
-              <a:t>Primer bloque ejecutable del notebook.</a:t>
+              <a:t>2 blobs + 5% de outliers uniformes. Isolation Forest aísla anomalías con menos splits. Salida: +1 inlier / -1 outlier.</a:t>
             </a:r>
           </a:p>
         </p:txBody>
@@ -5042,7 +5042,387 @@
                 </a:solidFill>
                 <a:latin typeface="Courier New"/>
               </a:rPr>
-              <a:t># Imports y configuración inicial</a:t>
+              <a:t>import numpy as np</a:t>
+            </a:r>
+          </a:p>
+          <a:p>
+            <a:pPr>
+              <a:defRPr sz="1200" b="0">
+                <a:solidFill>
+                  <a:srgbClr val="F8FAFC"/>
+                </a:solidFill>
+                <a:latin typeface="Courier New"/>
+              </a:defRPr>
+            </a:pPr>
+            <a:r>
+              <a:rPr sz="1200" b="0">
+                <a:solidFill>
+                  <a:srgbClr val="F8FAFC"/>
+                </a:solidFill>
+                <a:latin typeface="Courier New"/>
+              </a:rPr>
+              <a:t>import matplotlib.pyplot as plt</a:t>
+            </a:r>
+          </a:p>
+          <a:p>
+            <a:pPr>
+              <a:defRPr sz="1200" b="0">
+                <a:solidFill>
+                  <a:srgbClr val="F8FAFC"/>
+                </a:solidFill>
+                <a:latin typeface="Courier New"/>
+              </a:defRPr>
+            </a:pPr>
+            <a:r>
+              <a:rPr sz="1200" b="0">
+                <a:solidFill>
+                  <a:srgbClr val="F8FAFC"/>
+                </a:solidFill>
+                <a:latin typeface="Courier New"/>
+              </a:rPr>
+              <a:t>from sklearn.datasets import make_blobs</a:t>
+            </a:r>
+          </a:p>
+          <a:p>
+            <a:pPr>
+              <a:defRPr sz="1200" b="0">
+                <a:solidFill>
+                  <a:srgbClr val="F8FAFC"/>
+                </a:solidFill>
+                <a:latin typeface="Courier New"/>
+              </a:defRPr>
+            </a:pPr>
+            <a:r>
+              <a:rPr sz="1200" b="0">
+                <a:solidFill>
+                  <a:srgbClr val="F8FAFC"/>
+                </a:solidFill>
+                <a:latin typeface="Courier New"/>
+              </a:rPr>
+              <a:t>from sklearn.ensemble import IsolationForest</a:t>
+            </a:r>
+          </a:p>
+          <a:p>
+            <a:pPr>
+              <a:defRPr sz="1200" b="0">
+                <a:solidFill>
+                  <a:srgbClr val="F8FAFC"/>
+                </a:solidFill>
+                <a:latin typeface="Courier New"/>
+              </a:defRPr>
+            </a:pPr>
+            <a:r>
+              <a:rPr sz="1200" b="0">
+                <a:solidFill>
+                  <a:srgbClr val="F8FAFC"/>
+                </a:solidFill>
+                <a:latin typeface="Courier New"/>
+              </a:rPr>
+              <a:t> </a:t>
+            </a:r>
+          </a:p>
+          <a:p>
+            <a:pPr>
+              <a:defRPr sz="1200" b="0">
+                <a:solidFill>
+                  <a:srgbClr val="F8FAFC"/>
+                </a:solidFill>
+                <a:latin typeface="Courier New"/>
+              </a:defRPr>
+            </a:pPr>
+            <a:r>
+              <a:rPr sz="1200" b="0">
+                <a:solidFill>
+                  <a:srgbClr val="F8FAFC"/>
+                </a:solidFill>
+                <a:latin typeface="Courier New"/>
+              </a:rPr>
+              <a:t>np.random.seed(42)</a:t>
+            </a:r>
+          </a:p>
+          <a:p>
+            <a:pPr>
+              <a:defRPr sz="1200" b="0">
+                <a:solidFill>
+                  <a:srgbClr val="F8FAFC"/>
+                </a:solidFill>
+                <a:latin typeface="Courier New"/>
+              </a:defRPr>
+            </a:pPr>
+            <a:r>
+              <a:rPr sz="1200" b="0">
+                <a:solidFill>
+                  <a:srgbClr val="F8FAFC"/>
+                </a:solidFill>
+                <a:latin typeface="Courier New"/>
+              </a:rPr>
+              <a:t>rng = np.random.default_rng(42)</a:t>
+            </a:r>
+          </a:p>
+          <a:p>
+            <a:pPr>
+              <a:defRPr sz="1200" b="0">
+                <a:solidFill>
+                  <a:srgbClr val="F8FAFC"/>
+                </a:solidFill>
+                <a:latin typeface="Courier New"/>
+              </a:defRPr>
+            </a:pPr>
+            <a:r>
+              <a:rPr sz="1200" b="0">
+                <a:solidFill>
+                  <a:srgbClr val="F8FAFC"/>
+                </a:solidFill>
+                <a:latin typeface="Courier New"/>
+              </a:rPr>
+              <a:t> </a:t>
+            </a:r>
+          </a:p>
+          <a:p>
+            <a:pPr>
+              <a:defRPr sz="1200" b="0">
+                <a:solidFill>
+                  <a:srgbClr val="F8FAFC"/>
+                </a:solidFill>
+                <a:latin typeface="Courier New"/>
+              </a:defRPr>
+            </a:pPr>
+            <a:r>
+              <a:rPr sz="1200" b="0">
+                <a:solidFill>
+                  <a:srgbClr val="F8FAFC"/>
+                </a:solidFill>
+                <a:latin typeface="Courier New"/>
+              </a:rPr>
+              <a:t>X_norm, _ = make_blobs(n_samples=950, centers=2, cluster_std=1.0, random_state=42)</a:t>
+            </a:r>
+          </a:p>
+          <a:p>
+            <a:pPr>
+              <a:defRPr sz="1200" b="0">
+                <a:solidFill>
+                  <a:srgbClr val="F8FAFC"/>
+                </a:solidFill>
+                <a:latin typeface="Courier New"/>
+              </a:defRPr>
+            </a:pPr>
+            <a:r>
+              <a:rPr sz="1200" b="0">
+                <a:solidFill>
+                  <a:srgbClr val="F8FAFC"/>
+                </a:solidFill>
+                <a:latin typeface="Courier New"/>
+              </a:rPr>
+              <a:t>X_out = rng.uniform(X_norm.min(axis=0) - 3, X_norm.max(axis=0) + 3, size=(50, 2))</a:t>
+            </a:r>
+          </a:p>
+          <a:p>
+            <a:pPr>
+              <a:defRPr sz="1200" b="0">
+                <a:solidFill>
+                  <a:srgbClr val="F8FAFC"/>
+                </a:solidFill>
+                <a:latin typeface="Courier New"/>
+              </a:defRPr>
+            </a:pPr>
+            <a:r>
+              <a:rPr sz="1200" b="0">
+                <a:solidFill>
+                  <a:srgbClr val="F8FAFC"/>
+                </a:solidFill>
+                <a:latin typeface="Courier New"/>
+              </a:rPr>
+              <a:t>X = np.vstack([X_norm, X_out])</a:t>
+            </a:r>
+          </a:p>
+          <a:p>
+            <a:pPr>
+              <a:defRPr sz="1200" b="0">
+                <a:solidFill>
+                  <a:srgbClr val="F8FAFC"/>
+                </a:solidFill>
+                <a:latin typeface="Courier New"/>
+              </a:defRPr>
+            </a:pPr>
+            <a:r>
+              <a:rPr sz="1200" b="0">
+                <a:solidFill>
+                  <a:srgbClr val="F8FAFC"/>
+                </a:solidFill>
+                <a:latin typeface="Courier New"/>
+              </a:rPr>
+              <a:t>es_outlier = np.r_[np.zeros(950, bool), np.ones(50, bool)]</a:t>
+            </a:r>
+          </a:p>
+          <a:p>
+            <a:pPr>
+              <a:defRPr sz="1200" b="0">
+                <a:solidFill>
+                  <a:srgbClr val="F8FAFC"/>
+                </a:solidFill>
+                <a:latin typeface="Courier New"/>
+              </a:defRPr>
+            </a:pPr>
+            <a:r>
+              <a:rPr sz="1200" b="0">
+                <a:solidFill>
+                  <a:srgbClr val="F8FAFC"/>
+                </a:solidFill>
+                <a:latin typeface="Courier New"/>
+              </a:rPr>
+              <a:t> </a:t>
+            </a:r>
+          </a:p>
+          <a:p>
+            <a:pPr>
+              <a:defRPr sz="1200" b="0">
+                <a:solidFill>
+                  <a:srgbClr val="F8FAFC"/>
+                </a:solidFill>
+                <a:latin typeface="Courier New"/>
+              </a:defRPr>
+            </a:pPr>
+            <a:r>
+              <a:rPr sz="1200" b="0">
+                <a:solidFill>
+                  <a:srgbClr val="F8FAFC"/>
+                </a:solidFill>
+                <a:latin typeface="Courier New"/>
+              </a:rPr>
+              <a:t>iso = IsolationForest(contamination=0.05, random_state=42, n_jobs=1).fit(X)</a:t>
+            </a:r>
+          </a:p>
+          <a:p>
+            <a:pPr>
+              <a:defRPr sz="1200" b="0">
+                <a:solidFill>
+                  <a:srgbClr val="F8FAFC"/>
+                </a:solidFill>
+                <a:latin typeface="Courier New"/>
+              </a:defRPr>
+            </a:pPr>
+            <a:r>
+              <a:rPr sz="1200" b="0">
+                <a:solidFill>
+                  <a:srgbClr val="F8FAFC"/>
+                </a:solidFill>
+                <a:latin typeface="Courier New"/>
+              </a:rPr>
+              <a:t>pred = iso.predict(X)  # -1 outlier, +1 inlier</a:t>
+            </a:r>
+          </a:p>
+          <a:p>
+            <a:pPr>
+              <a:defRPr sz="1200" b="0">
+                <a:solidFill>
+                  <a:srgbClr val="F8FAFC"/>
+                </a:solidFill>
+                <a:latin typeface="Courier New"/>
+              </a:defRPr>
+            </a:pPr>
+            <a:r>
+              <a:rPr sz="1200" b="0">
+                <a:solidFill>
+                  <a:srgbClr val="F8FAFC"/>
+                </a:solidFill>
+                <a:latin typeface="Courier New"/>
+              </a:rPr>
+              <a:t>recall = ((pred == -1) &amp; es_outlier).sum() / es_outlier.sum()</a:t>
+            </a:r>
+          </a:p>
+          <a:p>
+            <a:pPr>
+              <a:defRPr sz="1200" b="0">
+                <a:solidFill>
+                  <a:srgbClr val="F8FAFC"/>
+                </a:solidFill>
+                <a:latin typeface="Courier New"/>
+              </a:defRPr>
+            </a:pPr>
+            <a:r>
+              <a:rPr sz="1200" b="0">
+                <a:solidFill>
+                  <a:srgbClr val="F8FAFC"/>
+                </a:solidFill>
+                <a:latin typeface="Courier New"/>
+              </a:rPr>
+              <a:t>print(f"outliers reales: {es_outlier.sum()} | detectados: {int((pred == -1).sum())}")</a:t>
+            </a:r>
+          </a:p>
+          <a:p>
+            <a:pPr>
+              <a:defRPr sz="1200" b="0">
+                <a:solidFill>
+                  <a:srgbClr val="F8FAFC"/>
+                </a:solidFill>
+                <a:latin typeface="Courier New"/>
+              </a:defRPr>
+            </a:pPr>
+            <a:r>
+              <a:rPr sz="1200" b="0">
+                <a:solidFill>
+                  <a:srgbClr val="F8FAFC"/>
+                </a:solidFill>
+                <a:latin typeface="Courier New"/>
+              </a:rPr>
+              <a:t>print(f"recall: {recall:.2%}")</a:t>
+            </a:r>
+          </a:p>
+          <a:p>
+            <a:pPr>
+              <a:defRPr sz="1200" b="0">
+                <a:solidFill>
+                  <a:srgbClr val="F8FAFC"/>
+                </a:solidFill>
+                <a:latin typeface="Courier New"/>
+              </a:defRPr>
+            </a:pPr>
+            <a:r>
+              <a:rPr sz="1200" b="0">
+                <a:solidFill>
+                  <a:srgbClr val="F8FAFC"/>
+                </a:solidFill>
+                <a:latin typeface="Courier New"/>
+              </a:rPr>
+              <a:t>assert recall &gt;= 0.6, "IsolationForest deberia recuperar buena parte de los outliers"</a:t>
+            </a:r>
+          </a:p>
+          <a:p>
+            <a:pPr>
+              <a:defRPr sz="1200" b="0">
+                <a:solidFill>
+                  <a:srgbClr val="F8FAFC"/>
+                </a:solidFill>
+                <a:latin typeface="Courier New"/>
+              </a:defRPr>
+            </a:pPr>
+            <a:r>
+              <a:rPr sz="1200" b="0">
+                <a:solidFill>
+                  <a:srgbClr val="F8FAFC"/>
+                </a:solidFill>
+                <a:latin typeface="Courier New"/>
+              </a:rPr>
+              <a:t> </a:t>
+            </a:r>
+          </a:p>
+          <a:p>
+            <a:pPr>
+              <a:defRPr sz="1200" b="0">
+                <a:solidFill>
+                  <a:srgbClr val="F8FAFC"/>
+                </a:solidFill>
+                <a:latin typeface="Courier New"/>
+              </a:defRPr>
+            </a:pPr>
+            <a:r>
+              <a:rPr sz="1200" b="0">
+                <a:solidFill>
+                  <a:srgbClr val="F8FAFC"/>
+                </a:solidFill>
+                <a:latin typeface="Courier New"/>
+              </a:rPr>
+              <a:t># ... (truncado)</a:t>
             </a:r>
           </a:p>
         </p:txBody>

--- a/classes/parte-1-machine-learning-clasico/099-deteccion-de-anomalias-isolation-forest-lof-one-class-svm/clase-099-deteccion-de-anomalias-isolation-forest-lof-one-class-svm-presentacion.pptx
+++ b/classes/parte-1-machine-learning-clasico/099-deteccion-de-anomalias-isolation-forest-lof-one-class-svm/clase-099-deteccion-de-anomalias-isolation-forest-lof-one-class-svm-presentacion.pptx
@@ -3272,7 +3272,7 @@
                 </a:solidFill>
                 <a:latin typeface="Segoe UI"/>
               </a:rPr>
-              <a:t>Parte: 1 — Machine Learning Clásico · Fuente: Géron, cap. 9 + sklearn outlier detection.  Duración estimada: 70 min.</a:t>
+              <a:t>Parte: 1 — Machine Learning Clásico · Fuente: Géron, cap. 9 + sklearn outlier detection.  Duración estimada: 70 min. · Nivel: Intermedio</a:t>
             </a:r>
           </a:p>
         </p:txBody>
@@ -3581,7 +3581,7 @@
                 </a:solidFill>
                 <a:latin typeface="Segoe UI"/>
               </a:rPr>
-              <a:t>Parte: 1 — Machine Learning Clásico · Fuente: Géron, cap. 9 + sklearn outlier detection.  Duración estimada: 70 min.</a:t>
+              <a:t>Parte: 1 — Machine Learning Clásico · Fuente: Géron, cap. 9 + sklearn outlier detection.  Duración estimada: 70 min. · Nivel: Intermedio</a:t>
             </a:r>
           </a:p>
         </p:txBody>
